--- a/Topic_D/Exam_Practice/TD-L03_Writing_Workshop_Subjects_Timetables_and_Preferences.pptx
+++ b/Topic_D/Exam_Practice/TD-L03_Writing_Workshop_Subjects_Timetables_and_Preferences.pptx
@@ -784,7 +784,11 @@
           <a:lstStyle/>
           <a:p>
             <a:r>
-              <a:rPr lang="en-US" dirty="0"/>
+              <a:rPr lang="ar-SA" dirty="0">
+                <a:latin typeface="Amiri" pitchFamily="2" charset="-78"/>
+                <a:ea typeface="Amiri" pitchFamily="2" charset="-78"/>
+                <a:cs typeface="Amiri" pitchFamily="2" charset="-78"/>
+              </a:rPr>
               <a:t>Q3 (3 min to choose and read). Title (أ) suits Core and Develop; title (ب) suits Stretch.</a:t>
             </a:r>
             <a:endParaRPr lang="en-US" dirty="0"/>
@@ -1403,7 +1407,11 @@
           <a:lstStyle/>
           <a:p>
             <a:r>
-              <a:rPr lang="en-US" dirty="0"/>
+              <a:rPr lang="ar-SA" dirty="0">
+                <a:latin typeface="Amiri" pitchFamily="2" charset="-78"/>
+                <a:ea typeface="Amiri" pitchFamily="2" charset="-78"/>
+                <a:cs typeface="Amiri" pitchFamily="2" charset="-78"/>
+              </a:rPr>
               <a:t>WELCOME (1 min) — while students join.
 • Greet each student by name as they arrive: السَّلَامُ عَلَيْكُمْ. Take the register (Pastoral Tracker: attendance 0/1).
 • 2-MINUTE CHECK-IN (SEND training): a private chat to any student who seemed unsettled last lesson — “Are you okay today? 👍 / 👎”.
@@ -1936,7 +1944,11 @@
           <a:lstStyle/>
           <a:p>
             <a:r>
-              <a:rPr lang="en-US" dirty="0"/>
+              <a:rPr lang="ar-SA" dirty="0">
+                <a:latin typeface="Amiri" pitchFamily="2" charset="-78"/>
+                <a:ea typeface="Amiri" pitchFamily="2" charset="-78"/>
+                <a:cs typeface="Amiri" pitchFamily="2" charset="-78"/>
+              </a:rPr>
               <a:t>Question words: مَتَى (when) · كَمْ (how many) · لِمَاذَا (why) · مَاذَا حَدَثَ (what happened — PAST) · سَتَخْتَارِينَ (you will choose — FUTURE).</a:t>
             </a:r>
             <a:endParaRPr lang="en-US" dirty="0"/>
@@ -2508,6 +2520,7 @@
                   <a:srgbClr val="D4AF37"/>
                 </a:solidFill>
                 <a:latin typeface="Amiri" pitchFamily="2" charset="-78"/>
+                <a:ea typeface="Amiri" pitchFamily="2" charset="-78"/>
                 <a:cs typeface="Amiri" pitchFamily="2" charset="-78"/>
               </a:rPr>
               <a:t>م</a:t>
@@ -2714,6 +2727,7 @@
                   <a:srgbClr val="D4AF37"/>
                 </a:solidFill>
                 <a:latin typeface="Amiri" pitchFamily="2" charset="-78"/>
+                <a:ea typeface="Amiri" pitchFamily="2" charset="-78"/>
                 <a:cs typeface="Amiri" pitchFamily="2" charset="-78"/>
               </a:rPr>
               <a:t>وَرْشَةُ الكِتَابَةِ — المَوَادُّ وَالجَدْوَلُ</a:t>
@@ -3171,6 +3185,7 @@
                   <a:srgbClr val="D4AF37"/>
                 </a:solidFill>
                 <a:latin typeface="Amiri" pitchFamily="2" charset="-78"/>
+                <a:ea typeface="Amiri" pitchFamily="2" charset="-78"/>
                 <a:cs typeface="Amiri" pitchFamily="2" charset="-78"/>
               </a:rPr>
               <a:t>م</a:t>
@@ -3491,6 +3506,7 @@
                   <a:srgbClr val="8A6D1E"/>
                 </a:solidFill>
                 <a:latin typeface="Amiri" pitchFamily="2" charset="-78"/>
+                <a:ea typeface="Amiri" pitchFamily="2" charset="-78"/>
                 <a:cs typeface="Amiri" pitchFamily="2" charset="-78"/>
               </a:rPr>
               <a:t>نَمُوذَجُ الإِجَابَةِ</a:t>
@@ -3604,6 +3620,7 @@
                   <a:srgbClr val="1F2A37"/>
                 </a:solidFill>
                 <a:latin typeface="Amiri" pitchFamily="2" charset="-78"/>
+                <a:ea typeface="Amiri" pitchFamily="2" charset="-78"/>
                 <a:cs typeface="Amiri" pitchFamily="2" charset="-78"/>
               </a:rPr>
               <a:t>مَرْحَبًا يَا جَدَّتِي،</a:t>
@@ -3623,6 +3640,7 @@
                   <a:srgbClr val="1F2A37"/>
                 </a:solidFill>
                 <a:latin typeface="Amiri" pitchFamily="2" charset="-78"/>
+                <a:ea typeface="Amiri" pitchFamily="2" charset="-78"/>
                 <a:cs typeface="Amiri" pitchFamily="2" charset="-78"/>
               </a:rPr>
               <a:t>كَيْفَ حَالُكِ؟ أُرِيدُ أَنْ أُخْبِرَكِ عَنْ جَدْوَلِي الجَدِيدِ. يَبْدَأُ يَوْمِي الدِّرَاسِيُّ فِي السَّاعَةِ الثَّامِنَةِ وَالنِّصْفِ، وَيَنْتَهِي فِي الثَّالِثَةِ. عِنْدِي سِتُّ حِصَصٍ كُلَّ يَوْمٍ. مَادَّتِيَ المُفَضَّلَةُ العَرَبِيَّةُ، لِأَنَّ المُعَلِّمَةَ لَطِيفَةٌ وَالدُّرُوسَ مُمْتِعَةٌ. أَمْسِ كَانَ عِنْدَنَا امْتِحَانٌ فِي الرِّيَاضِيَّاتِ، وَكَانَ صَعْبًا قَلِيلًا. فِي رَأْيِي، الرِّيَاضِيَّاتُ أَصْعَبُ مِنَ العُلُومِ، لٰكِنَّهَا مُفِيدَةٌ. فِي السَّنَةِ القَادِمَةِ سَأَخْتَارُ الكِيمْيَاءَ وَالأَحْيَاءَ، لِأَنِّي أُرِيدُ أَنْ أُصْبِحَ طَبِيبَةً.</a:t>
@@ -3642,6 +3660,7 @@
                   <a:srgbClr val="1F2A37"/>
                 </a:solidFill>
                 <a:latin typeface="Amiri" pitchFamily="2" charset="-78"/>
+                <a:ea typeface="Amiri" pitchFamily="2" charset="-78"/>
                 <a:cs typeface="Amiri" pitchFamily="2" charset="-78"/>
               </a:rPr>
               <a:t>مَعَ حُبِّي،</a:t>
@@ -3661,6 +3680,7 @@
                   <a:srgbClr val="1F2A37"/>
                 </a:solidFill>
                 <a:latin typeface="Amiri" pitchFamily="2" charset="-78"/>
+                <a:ea typeface="Amiri" pitchFamily="2" charset="-78"/>
                 <a:cs typeface="Amiri" pitchFamily="2" charset="-78"/>
               </a:rPr>
               <a:t>لَيْلَى</a:t>
@@ -3824,11 +3844,12 @@
               <a:buNone/>
             </a:pPr>
             <a:r>
-              <a:rPr lang="en-US" sz="950" b="1" dirty="0">
+              <a:rPr lang="ar-SA" sz="950" b="1" dirty="0">
                 <a:solidFill>
                   <a:srgbClr val="FFFFFF"/>
                 </a:solidFill>
                 <a:latin typeface="Calibri" pitchFamily="34" charset="0"/>
+                <a:ea typeface="Amiri" pitchFamily="2" charset="-78"/>
                 <a:cs typeface="Amiri" pitchFamily="2" charset="-78"/>
               </a:rPr>
               <a:t>فِي السَّاعَةِ الثَّامِنَةِ وَالنِّصْفِ</a:t>
@@ -3889,11 +3910,12 @@
               <a:buNone/>
             </a:pPr>
             <a:r>
-              <a:rPr lang="en-US" sz="950" b="1" dirty="0">
+              <a:rPr lang="ar-SA" sz="950" b="1" dirty="0">
                 <a:solidFill>
                   <a:srgbClr val="FFFFFF"/>
                 </a:solidFill>
                 <a:latin typeface="Calibri" pitchFamily="34" charset="0"/>
+                <a:ea typeface="Amiri" pitchFamily="2" charset="-78"/>
                 <a:cs typeface="Amiri" pitchFamily="2" charset="-78"/>
               </a:rPr>
               <a:t>سِتُّ حِصَصٍ</a:t>
@@ -3954,11 +3976,12 @@
               <a:buNone/>
             </a:pPr>
             <a:r>
-              <a:rPr lang="en-US" sz="950" b="1" dirty="0">
+              <a:rPr lang="ar-SA" sz="950" b="1" dirty="0">
                 <a:solidFill>
                   <a:srgbClr val="FFFFFF"/>
                 </a:solidFill>
                 <a:latin typeface="Calibri" pitchFamily="34" charset="0"/>
+                <a:ea typeface="Amiri" pitchFamily="2" charset="-78"/>
                 <a:cs typeface="Amiri" pitchFamily="2" charset="-78"/>
               </a:rPr>
               <a:t>أَصْعَبُ مِنَ العُلُومِ</a:t>
@@ -4019,11 +4042,12 @@
               <a:buNone/>
             </a:pPr>
             <a:r>
-              <a:rPr lang="en-US" sz="950" b="1" dirty="0">
+              <a:rPr lang="ar-SA" sz="950" b="1" dirty="0">
                 <a:solidFill>
                   <a:srgbClr val="FFFFFF"/>
                 </a:solidFill>
                 <a:latin typeface="Calibri" pitchFamily="34" charset="0"/>
+                <a:ea typeface="Amiri" pitchFamily="2" charset="-78"/>
                 <a:cs typeface="Amiri" pitchFamily="2" charset="-78"/>
               </a:rPr>
               <a:t>سَأَخْتَارُ</a:t>
@@ -4157,6 +4181,7 @@
                   <a:srgbClr val="D4AF37"/>
                 </a:solidFill>
                 <a:latin typeface="Amiri" pitchFamily="2" charset="-78"/>
+                <a:ea typeface="Amiri" pitchFamily="2" charset="-78"/>
                 <a:cs typeface="Amiri" pitchFamily="2" charset="-78"/>
               </a:rPr>
               <a:t>م</a:t>
@@ -4477,6 +4502,7 @@
                   <a:srgbClr val="8A6D1E"/>
                 </a:solidFill>
                 <a:latin typeface="Amiri" pitchFamily="2" charset="-78"/>
+                <a:ea typeface="Amiri" pitchFamily="2" charset="-78"/>
                 <a:cs typeface="Amiri" pitchFamily="2" charset="-78"/>
               </a:rPr>
               <a:t>نَمُوذَجُ الإِجَابَةِ</a:t>
@@ -4590,6 +4616,7 @@
                   <a:srgbClr val="1F2A37"/>
                 </a:solidFill>
                 <a:latin typeface="Amiri" pitchFamily="2" charset="-78"/>
+                <a:ea typeface="Amiri" pitchFamily="2" charset="-78"/>
                 <a:cs typeface="Amiri" pitchFamily="2" charset="-78"/>
               </a:rPr>
               <a:t>جَدَّتِيَ العَزِيزَةَ،</a:t>
@@ -4609,6 +4636,7 @@
                   <a:srgbClr val="1F2A37"/>
                 </a:solidFill>
                 <a:latin typeface="Amiri" pitchFamily="2" charset="-78"/>
+                <a:ea typeface="Amiri" pitchFamily="2" charset="-78"/>
                 <a:cs typeface="Amiri" pitchFamily="2" charset="-78"/>
               </a:rPr>
               <a:t>سَأَلْتِنِي عَنِ المَدْرَسَةِ، فَإِلَيْكِ أَخْبَارَ جَدْوَلِي الجَدِيدِ: يَبْدَأُ اليَوْمُ فِي الثَّامِنَةِ وَالنِّصْفِ وَيَنْتَهِي فِي الثَّالِثَةِ، وَبَيْنَهُمَا سِتُّ حِصَصٍ وَاسْتِرَاحَتَانِ قَصِيرَتَانِ. وَمَا زَالَتِ العَرَبِيَّةُ مَادَّتِيَ المُفَضَّلَةَ، لِأَنَّ مُعَلِّمَتَنَا تَرْبِطُ كُلَّ دَرْسٍ بِحَيَاتِنَا اليَوْمِيَّةِ، وَتَجْعَلُنَا نَكْتُبُ قِصَصًا قَصِيرَةً عَنْ أُسَرِنَا. أَمَّا الرِّيَاضِيَّاتُ فَأَصْبَحَتْ أَصْعَبَ بِكَثِيرٍ؛ فَقَدْ قَدَّمْنَا أَمْسِ امْتِحَانًا فِي الجَبْرِ لَمْ أُكْمِلْهُ فِي الوَقْتِ، فَخَرَجْتُ مِنَ الفَصْلِ حَزِينَةً. وَمَعَ أَنَّهَا تُتْعِبُنِي، فَإِنِّي أَعْرِفُ أَنَّهَا ضَرُورِيَّةٌ لِحُلْمِي. لِذٰلِكَ سَأَخْتَارُ العَامَ القَادِمَ الكِيمْيَاءَ وَالأَحْيَاءَ، وَإِذَا نَجَحْتُ، فَسَأَدْرُسُ الطِّبَّ.</a:t>
@@ -4628,6 +4656,7 @@
                   <a:srgbClr val="1F2A37"/>
                 </a:solidFill>
                 <a:latin typeface="Amiri" pitchFamily="2" charset="-78"/>
+                <a:ea typeface="Amiri" pitchFamily="2" charset="-78"/>
                 <a:cs typeface="Amiri" pitchFamily="2" charset="-78"/>
               </a:rPr>
               <a:t>مَعَ حُبِّي وَشَوْقِي،</a:t>
@@ -4647,6 +4676,7 @@
                   <a:srgbClr val="1F2A37"/>
                 </a:solidFill>
                 <a:latin typeface="Amiri" pitchFamily="2" charset="-78"/>
+                <a:ea typeface="Amiri" pitchFamily="2" charset="-78"/>
                 <a:cs typeface="Amiri" pitchFamily="2" charset="-78"/>
               </a:rPr>
               <a:t>لَيْلَى</a:t>
@@ -4810,11 +4840,12 @@
               <a:buNone/>
             </a:pPr>
             <a:r>
-              <a:rPr lang="en-US" sz="950" b="1" dirty="0">
+              <a:rPr lang="ar-SA" sz="950" b="1" dirty="0">
                 <a:solidFill>
                   <a:srgbClr val="FFFFFF"/>
                 </a:solidFill>
                 <a:latin typeface="Calibri" pitchFamily="34" charset="0"/>
+                <a:ea typeface="Amiri" pitchFamily="2" charset="-78"/>
                 <a:cs typeface="Amiri" pitchFamily="2" charset="-78"/>
               </a:rPr>
               <a:t>وَاسْتِرَاحَتَانِ قَصِيرَتَانِ</a:t>
@@ -4875,11 +4906,12 @@
               <a:buNone/>
             </a:pPr>
             <a:r>
-              <a:rPr lang="en-US" sz="950" b="1" dirty="0">
+              <a:rPr lang="ar-SA" sz="950" b="1" dirty="0">
                 <a:solidFill>
                   <a:srgbClr val="FFFFFF"/>
                 </a:solidFill>
                 <a:latin typeface="Calibri" pitchFamily="34" charset="0"/>
+                <a:ea typeface="Amiri" pitchFamily="2" charset="-78"/>
                 <a:cs typeface="Amiri" pitchFamily="2" charset="-78"/>
               </a:rPr>
               <a:t>مَا زَالَتِ العَرَبِيَّةُ</a:t>
@@ -4940,11 +4972,12 @@
               <a:buNone/>
             </a:pPr>
             <a:r>
-              <a:rPr lang="en-US" sz="950" b="1" dirty="0">
+              <a:rPr lang="ar-SA" sz="950" b="1" dirty="0">
                 <a:solidFill>
                   <a:srgbClr val="FFFFFF"/>
                 </a:solidFill>
                 <a:latin typeface="Calibri" pitchFamily="34" charset="0"/>
+                <a:ea typeface="Amiri" pitchFamily="2" charset="-78"/>
                 <a:cs typeface="Amiri" pitchFamily="2" charset="-78"/>
               </a:rPr>
               <a:t>لَمْ أُكْمِلْهُ</a:t>
@@ -5005,11 +5038,12 @@
               <a:buNone/>
             </a:pPr>
             <a:r>
-              <a:rPr lang="en-US" sz="950" b="1" dirty="0">
+              <a:rPr lang="ar-SA" sz="950" b="1" dirty="0">
                 <a:solidFill>
                   <a:srgbClr val="FFFFFF"/>
                 </a:solidFill>
                 <a:latin typeface="Calibri" pitchFamily="34" charset="0"/>
+                <a:ea typeface="Amiri" pitchFamily="2" charset="-78"/>
                 <a:cs typeface="Amiri" pitchFamily="2" charset="-78"/>
               </a:rPr>
               <a:t>مَعَ أَنَّهَا … فَإِنِّي</a:t>
@@ -5143,6 +5177,7 @@
                   <a:srgbClr val="D4AF37"/>
                 </a:solidFill>
                 <a:latin typeface="Amiri" pitchFamily="2" charset="-78"/>
+                <a:ea typeface="Amiri" pitchFamily="2" charset="-78"/>
                 <a:cs typeface="Amiri" pitchFamily="2" charset="-78"/>
               </a:rPr>
               <a:t>م</a:t>
@@ -5463,6 +5498,7 @@
                   <a:srgbClr val="8A6D1E"/>
                 </a:solidFill>
                 <a:latin typeface="Amiri" pitchFamily="2" charset="-78"/>
+                <a:ea typeface="Amiri" pitchFamily="2" charset="-78"/>
                 <a:cs typeface="Amiri" pitchFamily="2" charset="-78"/>
               </a:rPr>
               <a:t>اخْتَرْ عُنْوَانًا وَاحِدًا</a:t>
@@ -5743,6 +5779,7 @@
                   <a:srgbClr val="1B3B6F"/>
                 </a:solidFill>
                 <a:latin typeface="Amiri" pitchFamily="2" charset="-78"/>
+                <a:ea typeface="Amiri" pitchFamily="2" charset="-78"/>
                 <a:cs typeface="Amiri" pitchFamily="2" charset="-78"/>
               </a:rPr>
               <a:t>مَوَادِّي وَجَدْوَلِي</a:t>
@@ -5781,6 +5818,7 @@
                   <a:srgbClr val="1B3B6F"/>
                 </a:solidFill>
                 <a:latin typeface="Amiri" pitchFamily="2" charset="-78"/>
+                <a:ea typeface="Amiri" pitchFamily="2" charset="-78"/>
                 <a:cs typeface="Amiri" pitchFamily="2" charset="-78"/>
               </a:rPr>
               <a:t>(أ)</a:t>
@@ -5887,6 +5925,7 @@
                   <a:srgbClr val="1B3B6F"/>
                 </a:solidFill>
                 <a:latin typeface="Amiri" pitchFamily="2" charset="-78"/>
+                <a:ea typeface="Amiri" pitchFamily="2" charset="-78"/>
                 <a:cs typeface="Amiri" pitchFamily="2" charset="-78"/>
               </a:rPr>
               <a:t>جَدْوَلُكَ اليَوْمِيُّ · المَوَادُّ الَّتِي تُحِبُّهَا وَالَّتِي لَا تُحِبُّهَا · كَيْفَ تَغَيَّرَتْ تَفْضِيلَاتُكَ · اخْتِيَارَاتُكَ لِلْمُسْتَقْبَلِ</a:t>
@@ -6018,6 +6057,7 @@
                   <a:srgbClr val="1B3B6F"/>
                 </a:solidFill>
                 <a:latin typeface="Amiri" pitchFamily="2" charset="-78"/>
+                <a:ea typeface="Amiri" pitchFamily="2" charset="-78"/>
                 <a:cs typeface="Amiri" pitchFamily="2" charset="-78"/>
               </a:rPr>
               <a:t>اخْتِيَارُ المَوَادِّ: الشَّغَفُ أَمِ المُسْتَقْبَلُ؟</a:t>
@@ -6056,6 +6096,7 @@
                   <a:srgbClr val="1B3B6F"/>
                 </a:solidFill>
                 <a:latin typeface="Amiri" pitchFamily="2" charset="-78"/>
+                <a:ea typeface="Amiri" pitchFamily="2" charset="-78"/>
                 <a:cs typeface="Amiri" pitchFamily="2" charset="-78"/>
               </a:rPr>
               <a:t>(ب)</a:t>
@@ -6159,6 +6200,7 @@
                   <a:srgbClr val="1B3B6F"/>
                 </a:solidFill>
                 <a:latin typeface="Amiri" pitchFamily="2" charset="-78"/>
+                <a:ea typeface="Amiri" pitchFamily="2" charset="-78"/>
                 <a:cs typeface="Amiri" pitchFamily="2" charset="-78"/>
               </a:rPr>
               <a:t>القَرَارُ الصَّعْبُ · الشَّغَفُ وَمُتَطَلَّبَاتُ المِهَنِ · تَجْرِبَتُكَ · رَأْيُكَ</a:t>
@@ -6358,6 +6400,7 @@
                   <a:srgbClr val="D4AF37"/>
                 </a:solidFill>
                 <a:latin typeface="Amiri" pitchFamily="2" charset="-78"/>
+                <a:ea typeface="Amiri" pitchFamily="2" charset="-78"/>
                 <a:cs typeface="Amiri" pitchFamily="2" charset="-78"/>
               </a:rPr>
               <a:t>م</a:t>
@@ -6678,6 +6721,7 @@
                   <a:srgbClr val="8A6D1E"/>
                 </a:solidFill>
                 <a:latin typeface="Amiri" pitchFamily="2" charset="-78"/>
+                <a:ea typeface="Amiri" pitchFamily="2" charset="-78"/>
                 <a:cs typeface="Amiri" pitchFamily="2" charset="-78"/>
               </a:rPr>
               <a:t>خُطَّةُ الكِتَابَةِ</a:t>
@@ -7302,6 +7346,7 @@
                   <a:srgbClr val="1B3B6F"/>
                 </a:solidFill>
                 <a:latin typeface="Amiri" pitchFamily="2" charset="-78"/>
+                <a:ea typeface="Amiri" pitchFamily="2" charset="-78"/>
                 <a:cs typeface="Amiri" pitchFamily="2" charset="-78"/>
               </a:rPr>
               <a:t>يَبْدَأُ يَوْمِي فِي السَّاعَةِ الثَّامِنَةِ وَالنِّصْفِ.</a:t>
@@ -7401,6 +7446,7 @@
                   <a:srgbClr val="1B3B6F"/>
                 </a:solidFill>
                 <a:latin typeface="Amiri" pitchFamily="2" charset="-78"/>
+                <a:ea typeface="Amiri" pitchFamily="2" charset="-78"/>
                 <a:cs typeface="Amiri" pitchFamily="2" charset="-78"/>
               </a:rPr>
               <a:t>كَانَتِ المَوَادُّ أَسْهَلَ، وَكُنْتُ أُحِبُّ الرَّسْمَ.</a:t>
@@ -7500,6 +7546,7 @@
                   <a:srgbClr val="1B3B6F"/>
                 </a:solidFill>
                 <a:latin typeface="Amiri" pitchFamily="2" charset="-78"/>
+                <a:ea typeface="Amiri" pitchFamily="2" charset="-78"/>
                 <a:cs typeface="Amiri" pitchFamily="2" charset="-78"/>
               </a:rPr>
               <a:t>سَأَدْرُسُ التَّارِيخَ، لِأَنِّي أُرِيدُ أَنْ أَعْمَلَ صَحَفِيًّا.</a:t>
@@ -7661,6 +7708,7 @@
                   <a:srgbClr val="1F2A37"/>
                 </a:solidFill>
                 <a:latin typeface="Amiri" pitchFamily="2" charset="-78"/>
+                <a:ea typeface="Amiri" pitchFamily="2" charset="-78"/>
                 <a:cs typeface="Amiri" pitchFamily="2" charset="-78"/>
               </a:rPr>
               <a:t>أ</a:t>
@@ -7687,6 +7735,7 @@
                   <a:srgbClr val="1F2A37"/>
                 </a:solidFill>
                 <a:latin typeface="Amiri" pitchFamily="2" charset="-78"/>
+                <a:ea typeface="Amiri" pitchFamily="2" charset="-78"/>
                 <a:cs typeface="Amiri" pitchFamily="2" charset="-78"/>
               </a:rPr>
               <a:t>ب</a:t>
@@ -7833,6 +7882,7 @@
                   <a:srgbClr val="D4AF37"/>
                 </a:solidFill>
                 <a:latin typeface="Amiri" pitchFamily="2" charset="-78"/>
+                <a:ea typeface="Amiri" pitchFamily="2" charset="-78"/>
                 <a:cs typeface="Amiri" pitchFamily="2" charset="-78"/>
               </a:rPr>
               <a:t>م</a:t>
@@ -8090,6 +8140,7 @@
                   <a:srgbClr val="8A6D1E"/>
                 </a:solidFill>
                 <a:latin typeface="Amiri" pitchFamily="2" charset="-78"/>
+                <a:ea typeface="Amiri" pitchFamily="2" charset="-78"/>
                 <a:cs typeface="Amiri" pitchFamily="2" charset="-78"/>
               </a:rPr>
               <a:t>أ</a:t>
@@ -8154,6 +8205,7 @@
                   <a:srgbClr val="1B3B6F"/>
                 </a:solidFill>
                 <a:latin typeface="Amiri" pitchFamily="2" charset="-78"/>
+                <a:ea typeface="Amiri" pitchFamily="2" charset="-78"/>
                 <a:cs typeface="Amiri" pitchFamily="2" charset="-78"/>
               </a:rPr>
               <a:t>أ</a:t>
@@ -8205,6 +8257,7 @@
                   <a:srgbClr val="8A6D1E"/>
                 </a:solidFill>
                 <a:latin typeface="Amiri" pitchFamily="2" charset="-78"/>
+                <a:ea typeface="Amiri" pitchFamily="2" charset="-78"/>
                 <a:cs typeface="Amiri" pitchFamily="2" charset="-78"/>
               </a:rPr>
               <a:t>نَمُوذَجُ الإِجَابَةِ</a:t>
@@ -8318,6 +8371,7 @@
                   <a:srgbClr val="1F2A37"/>
                 </a:solidFill>
                 <a:latin typeface="Amiri" pitchFamily="2" charset="-78"/>
+                <a:ea typeface="Amiri" pitchFamily="2" charset="-78"/>
                 <a:cs typeface="Amiri" pitchFamily="2" charset="-78"/>
               </a:rPr>
               <a:t>أَدْرُسُ فِي الصَّفِّ العَاشِرِ، وَعِنْدِي تِسْعُ مَوَادَّ. يَبْدَأُ يَوْمِي الدِّرَاسِيُّ فِي السَّاعَةِ الثَّامِنَةِ وَالنِّصْفِ، وَيَنْتَهِي فِي الثَّالِثَةِ وَالرُّبْعِ. الاسْتِرَاحَةُ فِي العَاشِرَةِ وَالنِّصْفِ، وَالغَدَاءُ فِي السَّاعَةِ الوَاحِدَةِ. أَصِلُ إِلَى المَدْرَسَةِ بِالحَافِلَةِ.</a:t>
@@ -8337,6 +8391,7 @@
                   <a:srgbClr val="1F2A37"/>
                 </a:solidFill>
                 <a:latin typeface="Amiri" pitchFamily="2" charset="-78"/>
+                <a:ea typeface="Amiri" pitchFamily="2" charset="-78"/>
                 <a:cs typeface="Amiri" pitchFamily="2" charset="-78"/>
               </a:rPr>
               <a:t>مَادَّتِيَ المُفَضَّلَةُ التَّارِيخُ، لِأَنَّهُ مُمْتِعٌ، وَأَتَعَلَّمُ فِيهِ عَنْ حَضَارَاتٍ قَدِيمَةٍ. أُحِبُّ أَيْضًا العَرَبِيَّةَ، لِأَنَّهَا لُغَةُ عَائِلَتِي. لٰكِنِّي لَا أُحِبُّ الفِيزْيَاءَ كَثِيرًا، لِأَنَّهَا صَعْبَةٌ عَلَيَّ، وَالمُعَادَلَاتُ فِيهَا كَثِيرَةٌ جِدًّا.</a:t>
@@ -8356,6 +8411,7 @@
                   <a:srgbClr val="1F2A37"/>
                 </a:solidFill>
                 <a:latin typeface="Amiri" pitchFamily="2" charset="-78"/>
+                <a:ea typeface="Amiri" pitchFamily="2" charset="-78"/>
                 <a:cs typeface="Amiri" pitchFamily="2" charset="-78"/>
               </a:rPr>
               <a:t>فِي المَدْرَسَةِ الابْتِدَائِيَّةِ كَانَتِ المَوَادُّ أَسْهَلَ بِكَثِيرٍ. كُنْتُ أُحِبُّ الرَّسْمَ وَالمُوسِيقَى، وَكَانَ عِنْدَنَا وَقْتٌ طَوِيلٌ لِلَّعِبِ. فِي السَّنَةِ المَاضِيَةِ اخْتَرْتُ مَوَادِّي لِلشَّهَادَةِ، وَكَانَ الاخْتِيَارُ صَعْبًا، لِأَنِّي أُحِبُّ مَوَادَّ كَثِيرَةً.</a:t>
@@ -8375,6 +8431,7 @@
                   <a:srgbClr val="1F2A37"/>
                 </a:solidFill>
                 <a:latin typeface="Amiri" pitchFamily="2" charset="-78"/>
+                <a:ea typeface="Amiri" pitchFamily="2" charset="-78"/>
                 <a:cs typeface="Amiri" pitchFamily="2" charset="-78"/>
               </a:rPr>
               <a:t>فِي رَأْيِي، كُلُّ المَوَادِّ مُفِيدَةٌ، لٰكِنَّ بَعْضَهَا أَكْثَرُ أَهَمِّيَّةً لِلْمُسْتَقْبَلِ. فِي السَّنَةِ القَادِمَةِ سَأَدْرُسُ التَّارِيخَ وَالعَرَبِيَّةَ وَالإِنْجْلِيزِيَّةَ، لِأَنِّي أُرِيدُ أَنْ أَعْمَلَ صَحَفِيًّا فِي المُسْتَقْبَلِ.</a:t>
@@ -8538,11 +8595,12 @@
               <a:buNone/>
             </a:pPr>
             <a:r>
-              <a:rPr lang="en-US" sz="950" b="1" dirty="0">
+              <a:rPr lang="ar-SA" sz="950" b="1" dirty="0">
                 <a:solidFill>
                   <a:srgbClr val="FFFFFF"/>
                 </a:solidFill>
                 <a:latin typeface="Calibri" pitchFamily="34" charset="0"/>
+                <a:ea typeface="Amiri" pitchFamily="2" charset="-78"/>
                 <a:cs typeface="Amiri" pitchFamily="2" charset="-78"/>
               </a:rPr>
               <a:t>فِي السَّاعَةِ الثَّامِنَةِ</a:t>
@@ -8603,11 +8661,12 @@
               <a:buNone/>
             </a:pPr>
             <a:r>
-              <a:rPr lang="en-US" sz="950" b="1" dirty="0">
+              <a:rPr lang="ar-SA" sz="950" b="1" dirty="0">
                 <a:solidFill>
                   <a:srgbClr val="FFFFFF"/>
                 </a:solidFill>
                 <a:latin typeface="Calibri" pitchFamily="34" charset="0"/>
+                <a:ea typeface="Amiri" pitchFamily="2" charset="-78"/>
                 <a:cs typeface="Amiri" pitchFamily="2" charset="-78"/>
               </a:rPr>
               <a:t>لِأَنَّهُ مُمْتِعٌ</a:t>
@@ -8668,11 +8727,12 @@
               <a:buNone/>
             </a:pPr>
             <a:r>
-              <a:rPr lang="en-US" sz="950" b="1" dirty="0">
+              <a:rPr lang="ar-SA" sz="950" b="1" dirty="0">
                 <a:solidFill>
                   <a:srgbClr val="FFFFFF"/>
                 </a:solidFill>
                 <a:latin typeface="Calibri" pitchFamily="34" charset="0"/>
+                <a:ea typeface="Amiri" pitchFamily="2" charset="-78"/>
                 <a:cs typeface="Amiri" pitchFamily="2" charset="-78"/>
               </a:rPr>
               <a:t>كَانَتِ المَوَادُّ أَسْهَلَ</a:t>
@@ -8733,11 +8793,12 @@
               <a:buNone/>
             </a:pPr>
             <a:r>
-              <a:rPr lang="en-US" sz="950" b="1" dirty="0">
+              <a:rPr lang="ar-SA" sz="950" b="1" dirty="0">
                 <a:solidFill>
                   <a:srgbClr val="FFFFFF"/>
                 </a:solidFill>
                 <a:latin typeface="Calibri" pitchFamily="34" charset="0"/>
+                <a:ea typeface="Amiri" pitchFamily="2" charset="-78"/>
                 <a:cs typeface="Amiri" pitchFamily="2" charset="-78"/>
               </a:rPr>
               <a:t>لِأَنِّي أُرِيدُ أَنْ</a:t>
@@ -8871,6 +8932,7 @@
                   <a:srgbClr val="D4AF37"/>
                 </a:solidFill>
                 <a:latin typeface="Amiri" pitchFamily="2" charset="-78"/>
+                <a:ea typeface="Amiri" pitchFamily="2" charset="-78"/>
                 <a:cs typeface="Amiri" pitchFamily="2" charset="-78"/>
               </a:rPr>
               <a:t>م</a:t>
@@ -9128,6 +9190,7 @@
                   <a:srgbClr val="8A6D1E"/>
                 </a:solidFill>
                 <a:latin typeface="Amiri" pitchFamily="2" charset="-78"/>
+                <a:ea typeface="Amiri" pitchFamily="2" charset="-78"/>
                 <a:cs typeface="Amiri" pitchFamily="2" charset="-78"/>
               </a:rPr>
               <a:t>أ</a:t>
@@ -9192,6 +9255,7 @@
                   <a:srgbClr val="1B3B6F"/>
                 </a:solidFill>
                 <a:latin typeface="Amiri" pitchFamily="2" charset="-78"/>
+                <a:ea typeface="Amiri" pitchFamily="2" charset="-78"/>
                 <a:cs typeface="Amiri" pitchFamily="2" charset="-78"/>
               </a:rPr>
               <a:t>أ</a:t>
@@ -9243,6 +9307,7 @@
                   <a:srgbClr val="8A6D1E"/>
                 </a:solidFill>
                 <a:latin typeface="Amiri" pitchFamily="2" charset="-78"/>
+                <a:ea typeface="Amiri" pitchFamily="2" charset="-78"/>
                 <a:cs typeface="Amiri" pitchFamily="2" charset="-78"/>
               </a:rPr>
               <a:t>نَمُوذَجُ الإِجَابَةِ</a:t>
@@ -9356,6 +9421,7 @@
                   <a:srgbClr val="1F2A37"/>
                 </a:solidFill>
                 <a:latin typeface="Amiri" pitchFamily="2" charset="-78"/>
+                <a:ea typeface="Amiri" pitchFamily="2" charset="-78"/>
                 <a:cs typeface="Amiri" pitchFamily="2" charset="-78"/>
               </a:rPr>
               <a:t>يَقُولُ أَبِي إِنَّ الجَدْوَلَ الدِّرَاسِيَّ يَكْشِفُ شَخْصِيَّةَ الطَّالِبِ، وَأَظُنُّهُ مُحِقًّا؛ فَعِنْدَمَا أَنْظُرُ إِلَى جَدْوَلِي هٰذَا العَامَ، أَرَى مَزِيجًا يُشْبِهُنِي تَمَامًا: ثَلَاثَ مَوَادَّ عِلْمِيَّةً، وَثَلَاثَ لُغَاتٍ، وَالتَّارِيخَ الَّذِي لَا أَسْتَطِيعُ الاسْتِغْنَاءَ عَنْهُ.</a:t>
@@ -9375,6 +9441,7 @@
                   <a:srgbClr val="1F2A37"/>
                 </a:solidFill>
                 <a:latin typeface="Amiri" pitchFamily="2" charset="-78"/>
+                <a:ea typeface="Amiri" pitchFamily="2" charset="-78"/>
                 <a:cs typeface="Amiri" pitchFamily="2" charset="-78"/>
               </a:rPr>
               <a:t>يَبْدَأُ يَوْمِي فِي الثَّامِنَةِ وَالنِّصْفِ، وَأُفَضِّلُ أَنْ تَكُونَ المَوَادُّ الصَّعْبَةُ فِي الصَّبَاحِ، حِينَ يَكُونُ ذِهْنِي صَافِيًا. أَمَّا الحِصَصُ الَّتِي بَعْدَ الغَدَاءِ، فَأُفَضِّلُ أَنْ تَكُونَ عَمَلِيَّةً، كَالتَّجَارِبِ فِي المُخْتَبَرِ أَوِ النِّقَاشِ فِي حِصَّةِ التَّارِيخِ، لِأَنَّ الجُلُوسَ وَالاسْتِمَاعَ بَعْدَ الأَكْلِ يُشْعِرُنِي بِالنُّعَاسِ.</a:t>
@@ -9394,6 +9461,7 @@
                   <a:srgbClr val="1F2A37"/>
                 </a:solidFill>
                 <a:latin typeface="Amiri" pitchFamily="2" charset="-78"/>
+                <a:ea typeface="Amiri" pitchFamily="2" charset="-78"/>
                 <a:cs typeface="Amiri" pitchFamily="2" charset="-78"/>
               </a:rPr>
               <a:t>وَلَمْ تَكُنْ تَفْضِيلَاتِي دَائِمًا كَذٰلِكَ؛ فَفِي المَدْرَسَةِ الابْتِدَائِيَّةِ كُنْتُ أَكْرَهُ الرِّيَاضِيَّاتِ، إِلَى أَنْ جَاءَنَا مُعَلِّمٌ حَوَّلَ كُلَّ مَسْأَلَةٍ إِلَى لُغْزٍ، فَأَصْبَحْتُ أَنْتَظِرُ حِصَّتَهُ بِشَوْقٍ، وَأَحُلُّ الأَلْغَازَ حَتَّى فِي البَيْتِ.</a:t>
@@ -9413,6 +9481,7 @@
                   <a:srgbClr val="1F2A37"/>
                 </a:solidFill>
                 <a:latin typeface="Amiri" pitchFamily="2" charset="-78"/>
+                <a:ea typeface="Amiri" pitchFamily="2" charset="-78"/>
                 <a:cs typeface="Amiri" pitchFamily="2" charset="-78"/>
               </a:rPr>
               <a:t>صَحِيحٌ أَنَّ بَعْضَ المَوَادِّ أَصْعَبُ مِنْ غَيْرِهَا، غَيْرَ أَنَّ المُعَلِّمَ وَالطَّرِيقَةَ يَصْنَعَانِ الفَرْقَ. وَلَوْ أُتِيحَ لِي أَنْ أَخْتَارَ بِحُرِّيَّةٍ، لَأَضَفْتُ إِلَى الجَدْوَلِ حِصَّةً أُسْبُوعِيَّةً لِلْفَلْسَفَةِ، لِأَنَّهَا تُعَلِّمُنَا كَيْفَ نُفَكِّرُ، لَا مَاذَا نُفَكِّرُ.</a:t>
@@ -9511,11 +9580,12 @@
               <a:buNone/>
             </a:pPr>
             <a:r>
-              <a:rPr lang="en-US" sz="950" b="1" dirty="0">
+              <a:rPr lang="ar-SA" sz="950" b="1" dirty="0">
                 <a:solidFill>
                   <a:srgbClr val="FFFFFF"/>
                 </a:solidFill>
                 <a:latin typeface="Calibri" pitchFamily="34" charset="0"/>
+                <a:ea typeface="Amiri" pitchFamily="2" charset="-78"/>
                 <a:cs typeface="Amiri" pitchFamily="2" charset="-78"/>
               </a:rPr>
               <a:t>يَقُولُ … إِنَّ</a:t>
@@ -9576,11 +9646,12 @@
               <a:buNone/>
             </a:pPr>
             <a:r>
-              <a:rPr lang="en-US" sz="950" b="1" dirty="0">
+              <a:rPr lang="ar-SA" sz="950" b="1" dirty="0">
                 <a:solidFill>
                   <a:srgbClr val="FFFFFF"/>
                 </a:solidFill>
                 <a:latin typeface="Calibri" pitchFamily="34" charset="0"/>
+                <a:ea typeface="Amiri" pitchFamily="2" charset="-78"/>
                 <a:cs typeface="Amiri" pitchFamily="2" charset="-78"/>
               </a:rPr>
               <a:t>الَّذِي لَا أَسْتَطِيعُ</a:t>
@@ -9641,11 +9712,12 @@
               <a:buNone/>
             </a:pPr>
             <a:r>
-              <a:rPr lang="en-US" sz="950" b="1" dirty="0">
+              <a:rPr lang="ar-SA" sz="950" b="1" dirty="0">
                 <a:solidFill>
                   <a:srgbClr val="FFFFFF"/>
                 </a:solidFill>
                 <a:latin typeface="Calibri" pitchFamily="34" charset="0"/>
+                <a:ea typeface="Amiri" pitchFamily="2" charset="-78"/>
                 <a:cs typeface="Amiri" pitchFamily="2" charset="-78"/>
               </a:rPr>
               <a:t>إِلَى أَنْ جَاءَنَا</a:t>
@@ -9706,11 +9778,12 @@
               <a:buNone/>
             </a:pPr>
             <a:r>
-              <a:rPr lang="en-US" sz="950" b="1" dirty="0">
+              <a:rPr lang="ar-SA" sz="950" b="1" dirty="0">
                 <a:solidFill>
                   <a:srgbClr val="FFFFFF"/>
                 </a:solidFill>
                 <a:latin typeface="Calibri" pitchFamily="34" charset="0"/>
+                <a:ea typeface="Amiri" pitchFamily="2" charset="-78"/>
                 <a:cs typeface="Amiri" pitchFamily="2" charset="-78"/>
               </a:rPr>
               <a:t>لَوْ أُتِيحَ لِي … لَأَضَفْتُ</a:t>
@@ -9844,6 +9917,7 @@
                   <a:srgbClr val="D4AF37"/>
                 </a:solidFill>
                 <a:latin typeface="Amiri" pitchFamily="2" charset="-78"/>
+                <a:ea typeface="Amiri" pitchFamily="2" charset="-78"/>
                 <a:cs typeface="Amiri" pitchFamily="2" charset="-78"/>
               </a:rPr>
               <a:t>م</a:t>
@@ -10101,6 +10175,7 @@
                   <a:srgbClr val="8A6D1E"/>
                 </a:solidFill>
                 <a:latin typeface="Amiri" pitchFamily="2" charset="-78"/>
+                <a:ea typeface="Amiri" pitchFamily="2" charset="-78"/>
                 <a:cs typeface="Amiri" pitchFamily="2" charset="-78"/>
               </a:rPr>
               <a:t>ب</a:t>
@@ -10165,6 +10240,7 @@
                   <a:srgbClr val="1B3B6F"/>
                 </a:solidFill>
                 <a:latin typeface="Amiri" pitchFamily="2" charset="-78"/>
+                <a:ea typeface="Amiri" pitchFamily="2" charset="-78"/>
                 <a:cs typeface="Amiri" pitchFamily="2" charset="-78"/>
               </a:rPr>
               <a:t>ب</a:t>
@@ -10216,6 +10292,7 @@
                   <a:srgbClr val="8A6D1E"/>
                 </a:solidFill>
                 <a:latin typeface="Amiri" pitchFamily="2" charset="-78"/>
+                <a:ea typeface="Amiri" pitchFamily="2" charset="-78"/>
                 <a:cs typeface="Amiri" pitchFamily="2" charset="-78"/>
               </a:rPr>
               <a:t>نَمُوذَجُ الإِجَابَةِ</a:t>
@@ -10329,6 +10406,7 @@
                   <a:srgbClr val="1F2A37"/>
                 </a:solidFill>
                 <a:latin typeface="Amiri" pitchFamily="2" charset="-78"/>
+                <a:ea typeface="Amiri" pitchFamily="2" charset="-78"/>
                 <a:cs typeface="Amiri" pitchFamily="2" charset="-78"/>
               </a:rPr>
               <a:t>يُوَاجِهُ الطُّلَّابُ فِي سِنِّ الرَّابِعَةَ عَشْرَةَ قَرَارًا صَعْبًا: اخْتِيَارَ المَوَادِّ الَّتِي سَيَدْرُسُونَهَا لِلشَّهَادَةِ. فَهَلْ يَخْتَارُونَ مَا يُحِبُّونَ، أَمْ مَا يَضْمَنُ لَهُمْ وَظِيفَةً جَيِّدَةً فِي المُسْتَقْبَلِ؟</a:t>
@@ -10348,6 +10426,7 @@
                   <a:srgbClr val="1F2A37"/>
                 </a:solidFill>
                 <a:latin typeface="Amiri" pitchFamily="2" charset="-78"/>
+                <a:ea typeface="Amiri" pitchFamily="2" charset="-78"/>
                 <a:cs typeface="Amiri" pitchFamily="2" charset="-78"/>
               </a:rPr>
               <a:t>مِنْ نَاحِيَةٍ، يَدْرُسُ الطَّالِبُ المَادَّةَ الَّتِي يُحِبُّهَا بِحَمَاسٍ أَكْبَرَ، مِمَّا يُؤَدِّي غَالِبًا إِلَى نَتَائِجَ أَفْضَلَ. وَمِنْ نَاحِيَةٍ أُخْرَى، تَطْلُبُ بَعْضُ الجَامِعَاتِ وَالمِهَنِ مَوَادَّ مُحَدَّدَةً، كَالكِيمْيَاءِ لِلطِّبِّ وَالرِّيَاضِيَّاتِ لِلْهَنْدَسَةِ، فَلَا يَكْفِي الحُبُّ وَحْدَهُ، بَلْ يَجِبُ أَنْ يَعْرِفَ الطَّالِبُ أَيْنَ يُرِيدُ أَنْ يَصِلَ.</a:t>
@@ -10367,6 +10446,7 @@
                   <a:srgbClr val="1F2A37"/>
                 </a:solidFill>
                 <a:latin typeface="Amiri" pitchFamily="2" charset="-78"/>
+                <a:ea typeface="Amiri" pitchFamily="2" charset="-78"/>
                 <a:cs typeface="Amiri" pitchFamily="2" charset="-78"/>
               </a:rPr>
               <a:t>وَقَدْ عِشْتُ هٰذِهِ الحَيْرَةَ فِي العَامِ المَاضِي؛ فَكُنْتُ أُرِيدُ أَنْ أَخْتَارَ الفَنَّ، بَيْنَمَا نَصَحَنِي وَالِدَايَ بِالفِيزْيَاءِ. وَبَعْدَ نِقَاشٍ طَوِيلٍ مَعَ مُرْشِدِ المَدْرَسَةِ، اخْتَرْتُ الاثْنَيْنِ مَعًا، وَتَخَلَّيْتُ عَنِ الجُغْرَافْيَا، وَأَنَا اليَوْمَ سَعِيدٌ بِهٰذَا القَرَارِ.</a:t>
@@ -10386,6 +10466,7 @@
                   <a:srgbClr val="1F2A37"/>
                 </a:solidFill>
                 <a:latin typeface="Amiri" pitchFamily="2" charset="-78"/>
+                <a:ea typeface="Amiri" pitchFamily="2" charset="-78"/>
                 <a:cs typeface="Amiri" pitchFamily="2" charset="-78"/>
               </a:rPr>
               <a:t>صَحِيحٌ أَنَّ المُسْتَقْبَلَ يَحْتَاجُ إِلَى تَخْطِيطٍ، غَيْرَ أَنَّ الطَّالِبَ الَّذِي يَدْرُسُ مَا يَكْرَهُهُ نَادِرًا مَا يَتَفَوَّقُ. وَإِذَا وَازَنَ الطُّلَّابُ بَيْنَ شَغَفِهِمْ وَمُتَطَلَّبَاتِ أَحْلَامِهِمْ، فَسَيَصِلُونَ إِلَى خِيَارٍ يُرْضِيهِمُ اليَوْمَ وَيَخْدُمُهُمْ غَدًا بِلَا شَكٍّ.</a:t>
@@ -10484,11 +10565,12 @@
               <a:buNone/>
             </a:pPr>
             <a:r>
-              <a:rPr lang="en-US" sz="950" b="1" dirty="0">
+              <a:rPr lang="ar-SA" sz="950" b="1" dirty="0">
                 <a:solidFill>
                   <a:srgbClr val="FFFFFF"/>
                 </a:solidFill>
                 <a:latin typeface="Calibri" pitchFamily="34" charset="0"/>
+                <a:ea typeface="Amiri" pitchFamily="2" charset="-78"/>
                 <a:cs typeface="Amiri" pitchFamily="2" charset="-78"/>
               </a:rPr>
               <a:t>المَوَادِّ الَّتِي سَيَدْرُسُونَهَا</a:t>
@@ -10549,11 +10631,12 @@
               <a:buNone/>
             </a:pPr>
             <a:r>
-              <a:rPr lang="en-US" sz="950" b="1" dirty="0">
+              <a:rPr lang="ar-SA" sz="950" b="1" dirty="0">
                 <a:solidFill>
                   <a:srgbClr val="FFFFFF"/>
                 </a:solidFill>
                 <a:latin typeface="Calibri" pitchFamily="34" charset="0"/>
+                <a:ea typeface="Amiri" pitchFamily="2" charset="-78"/>
                 <a:cs typeface="Amiri" pitchFamily="2" charset="-78"/>
               </a:rPr>
               <a:t>مِمَّا يُؤَدِّي غَالِبًا</a:t>
@@ -10614,11 +10697,12 @@
               <a:buNone/>
             </a:pPr>
             <a:r>
-              <a:rPr lang="en-US" sz="950" b="1" dirty="0">
+              <a:rPr lang="ar-SA" sz="950" b="1" dirty="0">
                 <a:solidFill>
                   <a:srgbClr val="FFFFFF"/>
                 </a:solidFill>
                 <a:latin typeface="Calibri" pitchFamily="34" charset="0"/>
+                <a:ea typeface="Amiri" pitchFamily="2" charset="-78"/>
                 <a:cs typeface="Amiri" pitchFamily="2" charset="-78"/>
               </a:rPr>
               <a:t>بَيْنَمَا نَصَحَنِي</a:t>
@@ -10679,11 +10763,12 @@
               <a:buNone/>
             </a:pPr>
             <a:r>
-              <a:rPr lang="en-US" sz="950" b="1" dirty="0">
+              <a:rPr lang="ar-SA" sz="950" b="1" dirty="0">
                 <a:solidFill>
                   <a:srgbClr val="FFFFFF"/>
                 </a:solidFill>
                 <a:latin typeface="Calibri" pitchFamily="34" charset="0"/>
+                <a:ea typeface="Amiri" pitchFamily="2" charset="-78"/>
                 <a:cs typeface="Amiri" pitchFamily="2" charset="-78"/>
               </a:rPr>
               <a:t>إِذَا وَازَنَ … فَسَيَصِلُونَ</a:t>
@@ -10817,6 +10902,7 @@
                   <a:srgbClr val="D4AF37"/>
                 </a:solidFill>
                 <a:latin typeface="Amiri" pitchFamily="2" charset="-78"/>
+                <a:ea typeface="Amiri" pitchFamily="2" charset="-78"/>
                 <a:cs typeface="Amiri" pitchFamily="2" charset="-78"/>
               </a:rPr>
               <a:t>م</a:t>
@@ -11137,6 +11223,7 @@
                   <a:srgbClr val="8A6D1E"/>
                 </a:solidFill>
                 <a:latin typeface="Amiri" pitchFamily="2" charset="-78"/>
+                <a:ea typeface="Amiri" pitchFamily="2" charset="-78"/>
                 <a:cs typeface="Amiri" pitchFamily="2" charset="-78"/>
               </a:rPr>
               <a:t>قَيِّمْ عَمَلَكَ</a:t>
@@ -12381,6 +12468,7 @@
                   <a:srgbClr val="FFFFFF"/>
                 </a:solidFill>
                 <a:latin typeface="Amiri" pitchFamily="2" charset="-78"/>
+                <a:ea typeface="Amiri" pitchFamily="2" charset="-78"/>
                 <a:cs typeface="Amiri" pitchFamily="2" charset="-78"/>
               </a:rPr>
               <a:t>أَحْسَنْتُمْ! إِلَى اللِّقَاءِ</a:t>
@@ -12533,6 +12621,7 @@
                   <a:srgbClr val="D4AF37"/>
                 </a:solidFill>
                 <a:latin typeface="Amiri" pitchFamily="2" charset="-78"/>
+                <a:ea typeface="Amiri" pitchFamily="2" charset="-78"/>
                 <a:cs typeface="Amiri" pitchFamily="2" charset="-78"/>
               </a:rPr>
               <a:t>وَرْشَةُ التَّدْرِيبِ</a:t>
@@ -12666,6 +12755,7 @@
                   <a:srgbClr val="D4AF37"/>
                 </a:solidFill>
                 <a:latin typeface="Amiri" pitchFamily="2" charset="-78"/>
+                <a:ea typeface="Amiri" pitchFamily="2" charset="-78"/>
                 <a:cs typeface="Amiri" pitchFamily="2" charset="-78"/>
               </a:rPr>
               <a:t>م</a:t>
@@ -12986,6 +13076,7 @@
                   <a:srgbClr val="8A6D1E"/>
                 </a:solidFill>
                 <a:latin typeface="Amiri" pitchFamily="2" charset="-78"/>
+                <a:ea typeface="Amiri" pitchFamily="2" charset="-78"/>
                 <a:cs typeface="Amiri" pitchFamily="2" charset="-78"/>
               </a:rPr>
               <a:t>آدَابُ الصَّفِّ</a:t>
@@ -14517,6 +14608,7 @@
                   <a:srgbClr val="D4AF37"/>
                 </a:solidFill>
                 <a:latin typeface="Amiri" pitchFamily="2" charset="-78"/>
+                <a:ea typeface="Amiri" pitchFamily="2" charset="-78"/>
                 <a:cs typeface="Amiri" pitchFamily="2" charset="-78"/>
               </a:rPr>
               <a:t>م</a:t>
@@ -14837,6 +14929,7 @@
                   <a:srgbClr val="8A6D1E"/>
                 </a:solidFill>
                 <a:latin typeface="Amiri" pitchFamily="2" charset="-78"/>
+                <a:ea typeface="Amiri" pitchFamily="2" charset="-78"/>
                 <a:cs typeface="Amiri" pitchFamily="2" charset="-78"/>
               </a:rPr>
               <a:t>خَرِيطَةُ الوَرْشَةِ</a:t>
@@ -15151,6 +15244,7 @@
                   <a:srgbClr val="1B3B6F"/>
                 </a:solidFill>
                 <a:latin typeface="Amiri" pitchFamily="2" charset="-78"/>
+                <a:ea typeface="Amiri" pitchFamily="2" charset="-78"/>
                 <a:cs typeface="Amiri" pitchFamily="2" charset="-78"/>
               </a:rPr>
               <a:t>كَيْفَ</a:t>
@@ -15427,6 +15521,7 @@
                   <a:srgbClr val="1E6B52"/>
                 </a:solidFill>
                 <a:latin typeface="Amiri" pitchFamily="2" charset="-78"/>
+                <a:ea typeface="Amiri" pitchFamily="2" charset="-78"/>
                 <a:cs typeface="Amiri" pitchFamily="2" charset="-78"/>
               </a:rPr>
               <a:t>الاسْتِمَارَةُ</a:t>
@@ -15703,6 +15798,7 @@
                   <a:srgbClr val="1E6B52"/>
                 </a:solidFill>
                 <a:latin typeface="Amiri" pitchFamily="2" charset="-78"/>
+                <a:ea typeface="Amiri" pitchFamily="2" charset="-78"/>
                 <a:cs typeface="Amiri" pitchFamily="2" charset="-78"/>
               </a:rPr>
               <a:t>الرِّسَالَةُ</a:t>
@@ -15979,6 +16075,7 @@
                   <a:srgbClr val="1E6B52"/>
                 </a:solidFill>
                 <a:latin typeface="Amiri" pitchFamily="2" charset="-78"/>
+                <a:ea typeface="Amiri" pitchFamily="2" charset="-78"/>
                 <a:cs typeface="Amiri" pitchFamily="2" charset="-78"/>
               </a:rPr>
               <a:t>المَقَالُ</a:t>
@@ -16255,6 +16352,7 @@
                   <a:srgbClr val="8A6D1E"/>
                 </a:solidFill>
                 <a:latin typeface="Amiri" pitchFamily="2" charset="-78"/>
+                <a:ea typeface="Amiri" pitchFamily="2" charset="-78"/>
                 <a:cs typeface="Amiri" pitchFamily="2" charset="-78"/>
               </a:rPr>
               <a:t>قَيِّمْ</a:t>
@@ -16498,6 +16596,7 @@
                   <a:srgbClr val="D4AF37"/>
                 </a:solidFill>
                 <a:latin typeface="Amiri" pitchFamily="2" charset="-78"/>
+                <a:ea typeface="Amiri" pitchFamily="2" charset="-78"/>
                 <a:cs typeface="Amiri" pitchFamily="2" charset="-78"/>
               </a:rPr>
               <a:t>م</a:t>
@@ -16818,6 +16917,7 @@
                   <a:srgbClr val="8A6D1E"/>
                 </a:solidFill>
                 <a:latin typeface="Amiri" pitchFamily="2" charset="-78"/>
+                <a:ea typeface="Amiri" pitchFamily="2" charset="-78"/>
                 <a:cs typeface="Amiri" pitchFamily="2" charset="-78"/>
               </a:rPr>
               <a:t>امْتِحَانُ الكِتَابَةِ</a:t>
@@ -17442,6 +17542,7 @@
                   <a:srgbClr val="1B3B6F"/>
                 </a:solidFill>
                 <a:latin typeface="Amiri" pitchFamily="2" charset="-78"/>
+                <a:ea typeface="Amiri" pitchFamily="2" charset="-78"/>
                 <a:cs typeface="Amiri" pitchFamily="2" charset="-78"/>
               </a:rPr>
               <a:t>يَبْدَأُ اليَوْمُ فِي الثَّامِنَةِ وَالنِّصْفِ وَيَنْتَهِي فِي الثَّالِثَةِ</a:t>
@@ -17541,6 +17642,7 @@
                   <a:srgbClr val="1B3B6F"/>
                 </a:solidFill>
                 <a:latin typeface="Amiri" pitchFamily="2" charset="-78"/>
+                <a:ea typeface="Amiri" pitchFamily="2" charset="-78"/>
                 <a:cs typeface="Amiri" pitchFamily="2" charset="-78"/>
               </a:rPr>
               <a:t>أُفَضِّلُ التَّارِيخَ عَلَى الجُغْرَافْيَا، لِأَنَّهُ …</a:t>
@@ -17640,6 +17742,7 @@
                   <a:srgbClr val="1B3B6F"/>
                 </a:solidFill>
                 <a:latin typeface="Amiri" pitchFamily="2" charset="-78"/>
+                <a:ea typeface="Amiri" pitchFamily="2" charset="-78"/>
                 <a:cs typeface="Amiri" pitchFamily="2" charset="-78"/>
               </a:rPr>
               <a:t>الرِّيَاضِيَّاتُ أَصْعَبُ مِنَ العُلُومِ، لٰكِنَّهَا مُفِيدَةٌ</a:t>
@@ -17811,6 +17914,7 @@
                   <a:srgbClr val="D4AF37"/>
                 </a:solidFill>
                 <a:latin typeface="Amiri" pitchFamily="2" charset="-78"/>
+                <a:ea typeface="Amiri" pitchFamily="2" charset="-78"/>
                 <a:cs typeface="Amiri" pitchFamily="2" charset="-78"/>
               </a:rPr>
               <a:t>م</a:t>
@@ -18131,6 +18235,7 @@
                   <a:srgbClr val="8A6D1E"/>
                 </a:solidFill>
                 <a:latin typeface="Amiri" pitchFamily="2" charset="-78"/>
+                <a:ea typeface="Amiri" pitchFamily="2" charset="-78"/>
                 <a:cs typeface="Amiri" pitchFamily="2" charset="-78"/>
               </a:rPr>
               <a:t>اسْتِمَارَةُ اخْتِيَارِ المَوَادِّ</a:t>
@@ -18487,6 +18592,7 @@
                   <a:srgbClr val="1B3B6F"/>
                 </a:solidFill>
                 <a:latin typeface="Amiri" pitchFamily="2" charset="-78"/>
+                <a:ea typeface="Amiri" pitchFamily="2" charset="-78"/>
                 <a:cs typeface="Amiri" pitchFamily="2" charset="-78"/>
               </a:rPr>
               <a:t>الاسْمُ وَالصَّفُّ</a:t>
@@ -18731,6 +18837,7 @@
                   <a:srgbClr val="1B3B6F"/>
                 </a:solidFill>
                 <a:latin typeface="Amiri" pitchFamily="2" charset="-78"/>
+                <a:ea typeface="Amiri" pitchFamily="2" charset="-78"/>
                 <a:cs typeface="Amiri" pitchFamily="2" charset="-78"/>
               </a:rPr>
               <a:t>الاخْتِيَارُ الأَوَّلُ</a:t>
@@ -18975,6 +19082,7 @@
                   <a:srgbClr val="1B3B6F"/>
                 </a:solidFill>
                 <a:latin typeface="Amiri" pitchFamily="2" charset="-78"/>
+                <a:ea typeface="Amiri" pitchFamily="2" charset="-78"/>
                 <a:cs typeface="Amiri" pitchFamily="2" charset="-78"/>
               </a:rPr>
               <a:t>الاخْتِيَارُ الثَّانِي</a:t>
@@ -19219,6 +19327,7 @@
                   <a:srgbClr val="1B3B6F"/>
                 </a:solidFill>
                 <a:latin typeface="Amiri" pitchFamily="2" charset="-78"/>
+                <a:ea typeface="Amiri" pitchFamily="2" charset="-78"/>
                 <a:cs typeface="Amiri" pitchFamily="2" charset="-78"/>
               </a:rPr>
               <a:t>الاخْتِيَارُ الثَّالِثُ</a:t>
@@ -19463,6 +19572,7 @@
                   <a:srgbClr val="1B3B6F"/>
                 </a:solidFill>
                 <a:latin typeface="Amiri" pitchFamily="2" charset="-78"/>
+                <a:ea typeface="Amiri" pitchFamily="2" charset="-78"/>
                 <a:cs typeface="Amiri" pitchFamily="2" charset="-78"/>
               </a:rPr>
               <a:t>مَادَّةٌ صَعْبَةٌ عَلَيْكَ</a:t>
@@ -19707,6 +19817,7 @@
                   <a:srgbClr val="1B3B6F"/>
                 </a:solidFill>
                 <a:latin typeface="Amiri" pitchFamily="2" charset="-78"/>
+                <a:ea typeface="Amiri" pitchFamily="2" charset="-78"/>
                 <a:cs typeface="Amiri" pitchFamily="2" charset="-78"/>
               </a:rPr>
               <a:t>الوَقْتُ المُفَضَّلُ لِلدِّرَاسَةِ</a:t>
@@ -19951,6 +20062,7 @@
                   <a:srgbClr val="1B3B6F"/>
                 </a:solidFill>
                 <a:latin typeface="Amiri" pitchFamily="2" charset="-78"/>
+                <a:ea typeface="Amiri" pitchFamily="2" charset="-78"/>
                 <a:cs typeface="Amiri" pitchFamily="2" charset="-78"/>
               </a:rPr>
               <a:t>المِهْنَةُ الَّتِي تَحْلُمُ بِهَا</a:t>
@@ -20130,6 +20242,7 @@
                   <a:srgbClr val="1B3B6F"/>
                 </a:solidFill>
                 <a:latin typeface="Amiri" pitchFamily="2" charset="-78"/>
+                <a:ea typeface="Amiri" pitchFamily="2" charset="-78"/>
                 <a:cs typeface="Amiri" pitchFamily="2" charset="-78"/>
               </a:rPr>
               <a:t>جُمْلَةٌ: لِمَاذَا اخْتَرْتَ المَادَّةَ الأُولَى؟</a:t>
@@ -20339,6 +20452,7 @@
                   <a:srgbClr val="D4AF37"/>
                 </a:solidFill>
                 <a:latin typeface="Amiri" pitchFamily="2" charset="-78"/>
+                <a:ea typeface="Amiri" pitchFamily="2" charset="-78"/>
                 <a:cs typeface="Amiri" pitchFamily="2" charset="-78"/>
               </a:rPr>
               <a:t>م</a:t>
@@ -20659,6 +20773,7 @@
                   <a:srgbClr val="8A6D1E"/>
                 </a:solidFill>
                 <a:latin typeface="Amiri" pitchFamily="2" charset="-78"/>
+                <a:ea typeface="Amiri" pitchFamily="2" charset="-78"/>
                 <a:cs typeface="Amiri" pitchFamily="2" charset="-78"/>
               </a:rPr>
               <a:t>نَمُوذَجُ الإِجَابَةِ</a:t>
@@ -20977,6 +21092,7 @@
                   <a:srgbClr val="1B3B6F"/>
                 </a:solidFill>
                 <a:latin typeface="Amiri" pitchFamily="2" charset="-78"/>
+                <a:ea typeface="Amiri" pitchFamily="2" charset="-78"/>
                 <a:cs typeface="Amiri" pitchFamily="2" charset="-78"/>
               </a:rPr>
               <a:t>لَيْلَى أَحْمَدُ، التَّاسِعُ (أ)</a:t>
@@ -21015,6 +21131,7 @@
                   <a:srgbClr val="1B3B6F"/>
                 </a:solidFill>
                 <a:latin typeface="Amiri" pitchFamily="2" charset="-78"/>
+                <a:ea typeface="Amiri" pitchFamily="2" charset="-78"/>
                 <a:cs typeface="Amiri" pitchFamily="2" charset="-78"/>
               </a:rPr>
               <a:t>الاسْمُ وَالصَّفُّ</a:t>
@@ -21156,6 +21273,7 @@
                   <a:srgbClr val="1B3B6F"/>
                 </a:solidFill>
                 <a:latin typeface="Amiri" pitchFamily="2" charset="-78"/>
+                <a:ea typeface="Amiri" pitchFamily="2" charset="-78"/>
                 <a:cs typeface="Amiri" pitchFamily="2" charset="-78"/>
               </a:rPr>
               <a:t>الكِيمْيَاءُ</a:t>
@@ -21194,6 +21312,7 @@
                   <a:srgbClr val="1B3B6F"/>
                 </a:solidFill>
                 <a:latin typeface="Amiri" pitchFamily="2" charset="-78"/>
+                <a:ea typeface="Amiri" pitchFamily="2" charset="-78"/>
                 <a:cs typeface="Amiri" pitchFamily="2" charset="-78"/>
               </a:rPr>
               <a:t>الاخْتِيَارُ الأَوَّلُ</a:t>
@@ -21335,6 +21454,7 @@
                   <a:srgbClr val="1B3B6F"/>
                 </a:solidFill>
                 <a:latin typeface="Amiri" pitchFamily="2" charset="-78"/>
+                <a:ea typeface="Amiri" pitchFamily="2" charset="-78"/>
                 <a:cs typeface="Amiri" pitchFamily="2" charset="-78"/>
               </a:rPr>
               <a:t>اللُّغَةُ العَرَبِيَّةُ</a:t>
@@ -21373,6 +21493,7 @@
                   <a:srgbClr val="1B3B6F"/>
                 </a:solidFill>
                 <a:latin typeface="Amiri" pitchFamily="2" charset="-78"/>
+                <a:ea typeface="Amiri" pitchFamily="2" charset="-78"/>
                 <a:cs typeface="Amiri" pitchFamily="2" charset="-78"/>
               </a:rPr>
               <a:t>الاخْتِيَارُ الثَّانِي</a:t>
@@ -21514,6 +21635,7 @@
                   <a:srgbClr val="1B3B6F"/>
                 </a:solidFill>
                 <a:latin typeface="Amiri" pitchFamily="2" charset="-78"/>
+                <a:ea typeface="Amiri" pitchFamily="2" charset="-78"/>
                 <a:cs typeface="Amiri" pitchFamily="2" charset="-78"/>
               </a:rPr>
               <a:t>التَّارِيخُ</a:t>
@@ -21552,6 +21674,7 @@
                   <a:srgbClr val="1B3B6F"/>
                 </a:solidFill>
                 <a:latin typeface="Amiri" pitchFamily="2" charset="-78"/>
+                <a:ea typeface="Amiri" pitchFamily="2" charset="-78"/>
                 <a:cs typeface="Amiri" pitchFamily="2" charset="-78"/>
               </a:rPr>
               <a:t>الاخْتِيَارُ الثَّالِثُ</a:t>
@@ -21693,6 +21816,7 @@
                   <a:srgbClr val="1B3B6F"/>
                 </a:solidFill>
                 <a:latin typeface="Amiri" pitchFamily="2" charset="-78"/>
+                <a:ea typeface="Amiri" pitchFamily="2" charset="-78"/>
                 <a:cs typeface="Amiri" pitchFamily="2" charset="-78"/>
               </a:rPr>
               <a:t>الفِيزْيَاءُ</a:t>
@@ -21731,6 +21855,7 @@
                   <a:srgbClr val="1B3B6F"/>
                 </a:solidFill>
                 <a:latin typeface="Amiri" pitchFamily="2" charset="-78"/>
+                <a:ea typeface="Amiri" pitchFamily="2" charset="-78"/>
                 <a:cs typeface="Amiri" pitchFamily="2" charset="-78"/>
               </a:rPr>
               <a:t>مَادَّةٌ صَعْبَةٌ عَلَيْكَ</a:t>
@@ -21872,6 +21997,7 @@
                   <a:srgbClr val="1B3B6F"/>
                 </a:solidFill>
                 <a:latin typeface="Amiri" pitchFamily="2" charset="-78"/>
+                <a:ea typeface="Amiri" pitchFamily="2" charset="-78"/>
                 <a:cs typeface="Amiri" pitchFamily="2" charset="-78"/>
               </a:rPr>
               <a:t>مِنَ الخَامِسَةِ إِلَى السَّادِسَةِ مَسَاءً</a:t>
@@ -21910,6 +22036,7 @@
                   <a:srgbClr val="1B3B6F"/>
                 </a:solidFill>
                 <a:latin typeface="Amiri" pitchFamily="2" charset="-78"/>
+                <a:ea typeface="Amiri" pitchFamily="2" charset="-78"/>
                 <a:cs typeface="Amiri" pitchFamily="2" charset="-78"/>
               </a:rPr>
               <a:t>الوَقْتُ المُفَضَّلُ لِلدِّرَاسَةِ</a:t>
@@ -22051,6 +22178,7 @@
                   <a:srgbClr val="1B3B6F"/>
                 </a:solidFill>
                 <a:latin typeface="Amiri" pitchFamily="2" charset="-78"/>
+                <a:ea typeface="Amiri" pitchFamily="2" charset="-78"/>
                 <a:cs typeface="Amiri" pitchFamily="2" charset="-78"/>
               </a:rPr>
               <a:t>صَيْدَلَانِيَّةٌ</a:t>
@@ -22089,6 +22217,7 @@
                   <a:srgbClr val="1B3B6F"/>
                 </a:solidFill>
                 <a:latin typeface="Amiri" pitchFamily="2" charset="-78"/>
+                <a:ea typeface="Amiri" pitchFamily="2" charset="-78"/>
                 <a:cs typeface="Amiri" pitchFamily="2" charset="-78"/>
               </a:rPr>
               <a:t>المِهْنَةُ الَّتِي تَحْلُمُ بِهَا</a:t>
@@ -22230,6 +22359,7 @@
                   <a:srgbClr val="1B3B6F"/>
                 </a:solidFill>
                 <a:latin typeface="Amiri" pitchFamily="2" charset="-78"/>
+                <a:ea typeface="Amiri" pitchFamily="2" charset="-78"/>
                 <a:cs typeface="Amiri" pitchFamily="2" charset="-78"/>
               </a:rPr>
               <a:t>اخْتَرْتُ الكِيمْيَاءَ لِأَنَّهَا ضَرُورِيَّةٌ لِلصَّيْدَلَةِ، مَعَ أَنَّهَا أَصْعَبُ مِنَ الأَحْيَاءِ.</a:t>
@@ -22268,6 +22398,7 @@
                   <a:srgbClr val="1B3B6F"/>
                 </a:solidFill>
                 <a:latin typeface="Amiri" pitchFamily="2" charset="-78"/>
+                <a:ea typeface="Amiri" pitchFamily="2" charset="-78"/>
                 <a:cs typeface="Amiri" pitchFamily="2" charset="-78"/>
               </a:rPr>
               <a:t>جُمْلَةٌ: لِمَاذَا اخْتَرْتَ المَادَّةَ الأُولَى؟</a:t>
@@ -22477,6 +22608,7 @@
                   <a:srgbClr val="D4AF37"/>
                 </a:solidFill>
                 <a:latin typeface="Amiri" pitchFamily="2" charset="-78"/>
+                <a:ea typeface="Amiri" pitchFamily="2" charset="-78"/>
                 <a:cs typeface="Amiri" pitchFamily="2" charset="-78"/>
               </a:rPr>
               <a:t>م</a:t>
@@ -22797,6 +22929,7 @@
                   <a:srgbClr val="8A6D1E"/>
                 </a:solidFill>
                 <a:latin typeface="Amiri" pitchFamily="2" charset="-78"/>
+                <a:ea typeface="Amiri" pitchFamily="2" charset="-78"/>
                 <a:cs typeface="Amiri" pitchFamily="2" charset="-78"/>
               </a:rPr>
               <a:t>جَدْوَلِي الجَدِيدُ</a:t>
@@ -23272,6 +23405,7 @@
                   <a:srgbClr val="1B3B6F"/>
                 </a:solidFill>
                 <a:latin typeface="Amiri" pitchFamily="2" charset="-78"/>
+                <a:ea typeface="Amiri" pitchFamily="2" charset="-78"/>
                 <a:cs typeface="Amiri" pitchFamily="2" charset="-78"/>
               </a:rPr>
               <a:t>يَبْدَأُ يَوْمِي فِي السَّاعَةِ … وَيَنْتَهِي فِي …</a:t>
@@ -23348,6 +23482,7 @@
                   <a:srgbClr val="1B3B6F"/>
                 </a:solidFill>
                 <a:latin typeface="Amiri" pitchFamily="2" charset="-78"/>
+                <a:ea typeface="Amiri" pitchFamily="2" charset="-78"/>
                 <a:cs typeface="Amiri" pitchFamily="2" charset="-78"/>
               </a:rPr>
               <a:t>مَادَّتِيَ المُفَضَّلَةُ … لِأَنَّ …</a:t>
@@ -23424,6 +23559,7 @@
                   <a:srgbClr val="1B3B6F"/>
                 </a:solidFill>
                 <a:latin typeface="Amiri" pitchFamily="2" charset="-78"/>
+                <a:ea typeface="Amiri" pitchFamily="2" charset="-78"/>
                 <a:cs typeface="Amiri" pitchFamily="2" charset="-78"/>
               </a:rPr>
               <a:t>أَمْسِ كَانَ عِنْدَنَا امْتِحَانٌ فِي …</a:t>
@@ -23500,6 +23636,7 @@
                   <a:srgbClr val="1B3B6F"/>
                 </a:solidFill>
                 <a:latin typeface="Amiri" pitchFamily="2" charset="-78"/>
+                <a:ea typeface="Amiri" pitchFamily="2" charset="-78"/>
                 <a:cs typeface="Amiri" pitchFamily="2" charset="-78"/>
               </a:rPr>
               <a:t>سَأَخْتَارُ … لِأَنِّي أُرِيدُ أَنْ …</a:t>
@@ -23671,6 +23808,7 @@
                   <a:srgbClr val="D4AF37"/>
                 </a:solidFill>
                 <a:latin typeface="Amiri" pitchFamily="2" charset="-78"/>
+                <a:ea typeface="Amiri" pitchFamily="2" charset="-78"/>
                 <a:cs typeface="Amiri" pitchFamily="2" charset="-78"/>
               </a:rPr>
               <a:t>م</a:t>
@@ -23991,6 +24129,7 @@
                   <a:srgbClr val="8A6D1E"/>
                 </a:solidFill>
                 <a:latin typeface="Amiri" pitchFamily="2" charset="-78"/>
+                <a:ea typeface="Amiri" pitchFamily="2" charset="-78"/>
                 <a:cs typeface="Amiri" pitchFamily="2" charset="-78"/>
               </a:rPr>
               <a:t>نَصُّ السُّؤَالِ</a:t>
@@ -24271,6 +24410,7 @@
                   <a:srgbClr val="1B3B6F"/>
                 </a:solidFill>
                 <a:latin typeface="Amiri" pitchFamily="2" charset="-78"/>
+                <a:ea typeface="Amiri" pitchFamily="2" charset="-78"/>
                 <a:cs typeface="Amiri" pitchFamily="2" charset="-78"/>
               </a:rPr>
               <a:t>اكْتُبِي رِسَالَةً إِلَى أَحَدِ أَقَارِبِكِ عَنْ جَدْوَلِكِ الدِّرَاسِيِّ (٨٠–٩٠ كَلِمَةً).</a:t>
@@ -24412,6 +24552,7 @@
                   <a:srgbClr val="1B3B6F"/>
                 </a:solidFill>
                 <a:latin typeface="Amiri" pitchFamily="2" charset="-78"/>
+                <a:ea typeface="Amiri" pitchFamily="2" charset="-78"/>
                 <a:cs typeface="Amiri" pitchFamily="2" charset="-78"/>
               </a:rPr>
               <a:t>مَتَى يَبْدَأُ يَوْمُكِ وَيَنْتَهِي؟ وَكَمْ حِصَّةً عِنْدَكِ؟</a:t>
@@ -24553,6 +24694,7 @@
                   <a:srgbClr val="1B3B6F"/>
                 </a:solidFill>
                 <a:latin typeface="Amiri" pitchFamily="2" charset="-78"/>
+                <a:ea typeface="Amiri" pitchFamily="2" charset="-78"/>
                 <a:cs typeface="Amiri" pitchFamily="2" charset="-78"/>
               </a:rPr>
               <a:t>مَا مَادَّتُكِ المُفَضَّلَةُ؟ وَلِمَاذَا؟</a:t>
@@ -24694,6 +24836,7 @@
                   <a:srgbClr val="1B3B6F"/>
                 </a:solidFill>
                 <a:latin typeface="Amiri" pitchFamily="2" charset="-78"/>
+                <a:ea typeface="Amiri" pitchFamily="2" charset="-78"/>
                 <a:cs typeface="Amiri" pitchFamily="2" charset="-78"/>
               </a:rPr>
               <a:t>مَاذَا حَدَثَ فِي حِصَّةٍ مُؤَخَّرًا؟</a:t>
@@ -24835,6 +24978,7 @@
                   <a:srgbClr val="1B3B6F"/>
                 </a:solidFill>
                 <a:latin typeface="Amiri" pitchFamily="2" charset="-78"/>
+                <a:ea typeface="Amiri" pitchFamily="2" charset="-78"/>
                 <a:cs typeface="Amiri" pitchFamily="2" charset="-78"/>
               </a:rPr>
               <a:t>أَيَّ مَوَادَّ سَتَخْتَارِينَ السَّنَةَ القَادِمَةَ؟ وَلِمَاذَا؟</a:t>
@@ -25044,6 +25188,7 @@
                   <a:srgbClr val="D4AF37"/>
                 </a:solidFill>
                 <a:latin typeface="Amiri" pitchFamily="2" charset="-78"/>
+                <a:ea typeface="Amiri" pitchFamily="2" charset="-78"/>
                 <a:cs typeface="Amiri" pitchFamily="2" charset="-78"/>
               </a:rPr>
               <a:t>م</a:t>
@@ -25364,6 +25509,7 @@
                   <a:srgbClr val="8A6D1E"/>
                 </a:solidFill>
                 <a:latin typeface="Amiri" pitchFamily="2" charset="-78"/>
+                <a:ea typeface="Amiri" pitchFamily="2" charset="-78"/>
                 <a:cs typeface="Amiri" pitchFamily="2" charset="-78"/>
               </a:rPr>
               <a:t>قَوَالِبُ الكِتَابَةِ</a:t>
@@ -25644,6 +25790,7 @@
                   <a:srgbClr val="1B3B6F"/>
                 </a:solidFill>
                 <a:latin typeface="Amiri" pitchFamily="2" charset="-78"/>
+                <a:ea typeface="Amiri" pitchFamily="2" charset="-78"/>
                 <a:cs typeface="Amiri" pitchFamily="2" charset="-78"/>
               </a:rPr>
               <a:t>مَرْحَبًا يَا ______ ، كَيْفَ حَالُكِ؟</a:t>
@@ -25850,6 +25997,7 @@
                   <a:srgbClr val="1B3B6F"/>
                 </a:solidFill>
                 <a:latin typeface="Amiri" pitchFamily="2" charset="-78"/>
+                <a:ea typeface="Amiri" pitchFamily="2" charset="-78"/>
                 <a:cs typeface="Amiri" pitchFamily="2" charset="-78"/>
               </a:rPr>
               <a:t>يَبْدَأُ يَوْمِي فِي السَّاعَةِ ______ ، وَيَنْتَهِي فِي ______ . عِنْدِي ______ حِصَصٍ.</a:t>
@@ -26056,6 +26204,7 @@
                   <a:srgbClr val="1B3B6F"/>
                 </a:solidFill>
                 <a:latin typeface="Amiri" pitchFamily="2" charset="-78"/>
+                <a:ea typeface="Amiri" pitchFamily="2" charset="-78"/>
                 <a:cs typeface="Amiri" pitchFamily="2" charset="-78"/>
               </a:rPr>
               <a:t>مَادَّتِيَ المُفَضَّلَةُ ______ ، لِأَنَّ ______ .</a:t>
@@ -26262,6 +26411,7 @@
                   <a:srgbClr val="1B3B6F"/>
                 </a:solidFill>
                 <a:latin typeface="Amiri" pitchFamily="2" charset="-78"/>
+                <a:ea typeface="Amiri" pitchFamily="2" charset="-78"/>
                 <a:cs typeface="Amiri" pitchFamily="2" charset="-78"/>
               </a:rPr>
               <a:t>أَمْسِ كَانَ عِنْدَنَا ______ فِي ______ ، وَكَانَ ______ .</a:t>
@@ -26468,6 +26618,7 @@
                   <a:srgbClr val="1B3B6F"/>
                 </a:solidFill>
                 <a:latin typeface="Amiri" pitchFamily="2" charset="-78"/>
+                <a:ea typeface="Amiri" pitchFamily="2" charset="-78"/>
                 <a:cs typeface="Amiri" pitchFamily="2" charset="-78"/>
               </a:rPr>
               <a:t>فِي السَّنَةِ القَادِمَةِ سَأَخْتَارُ ______ ، لِأَنِّي أُرِيدُ أَنْ ______ .</a:t>
@@ -26674,6 +26825,7 @@
                   <a:srgbClr val="1B3B6F"/>
                 </a:solidFill>
                 <a:latin typeface="Amiri" pitchFamily="2" charset="-78"/>
+                <a:ea typeface="Amiri" pitchFamily="2" charset="-78"/>
                 <a:cs typeface="Amiri" pitchFamily="2" charset="-78"/>
               </a:rPr>
               <a:t>مَعَ حُبِّي، ______</a:t>
@@ -26913,13 +27065,9 @@
     <a:fontScheme name="Office">
       <a:majorFont>
         <a:latin typeface="Calibri Light" panose="020F0302020204030204"/>
-        <a:ea typeface=""/>
-        <a:cs typeface=""/>
-        <a:font script="Jpan" typeface="游ゴシック Light"/>
-        <a:font script="Hang" typeface="맑은 고딕"/>
-        <a:font script="Hans" typeface="等线 Light"/>
-        <a:font script="Hant" typeface="新細明體"/>
-        <a:font script="Arab" typeface="Times New Roman"/>
+        <a:ea typeface="Amiri" pitchFamily="2" charset="-78"/>
+        <a:cs typeface="Amiri" pitchFamily="2" charset="-78"/>
+        <a:font script="Arab" typeface="Amiri"/>
         <a:font script="Hebr" typeface="Times New Roman"/>
         <a:font script="Thai" typeface="Angsana New"/>
         <a:font script="Ethi" typeface="Nyala"/>
@@ -26965,13 +27113,9 @@
       </a:majorFont>
       <a:minorFont>
         <a:latin typeface="Calibri" panose="020F0502020204030204"/>
-        <a:ea typeface=""/>
-        <a:cs typeface=""/>
-        <a:font script="Jpan" typeface="游ゴシック"/>
-        <a:font script="Hang" typeface="맑은 고딕"/>
-        <a:font script="Hans" typeface="等线"/>
-        <a:font script="Hant" typeface="新細明體"/>
-        <a:font script="Arab" typeface="Arial"/>
+        <a:ea typeface="Amiri" pitchFamily="2" charset="-78"/>
+        <a:cs typeface="Amiri" pitchFamily="2" charset="-78"/>
+        <a:font script="Arab" typeface="Amiri"/>
         <a:font script="Hebr" typeface="Arial"/>
         <a:font script="Thai" typeface="Cordia New"/>
         <a:font script="Ethi" typeface="Nyala"/>

--- a/Topic_D/Exam_Practice/TD-L03_Writing_Workshop_Subjects_Timetables_and_Preferences.pptx
+++ b/Topic_D/Exam_Practice/TD-L03_Writing_Workshop_Subjects_Timetables_and_Preferences.pptx
@@ -3848,7 +3848,7 @@
                 <a:solidFill>
                   <a:srgbClr val="FFFFFF"/>
                 </a:solidFill>
-                <a:latin typeface="Calibri" pitchFamily="34" charset="0"/>
+                <a:latin typeface="Amiri" pitchFamily="2" charset="-78"/>
                 <a:ea typeface="Amiri" pitchFamily="2" charset="-78"/>
                 <a:cs typeface="Amiri" pitchFamily="2" charset="-78"/>
               </a:rPr>
@@ -3914,7 +3914,7 @@
                 <a:solidFill>
                   <a:srgbClr val="FFFFFF"/>
                 </a:solidFill>
-                <a:latin typeface="Calibri" pitchFamily="34" charset="0"/>
+                <a:latin typeface="Amiri" pitchFamily="2" charset="-78"/>
                 <a:ea typeface="Amiri" pitchFamily="2" charset="-78"/>
                 <a:cs typeface="Amiri" pitchFamily="2" charset="-78"/>
               </a:rPr>
@@ -3980,7 +3980,7 @@
                 <a:solidFill>
                   <a:srgbClr val="FFFFFF"/>
                 </a:solidFill>
-                <a:latin typeface="Calibri" pitchFamily="34" charset="0"/>
+                <a:latin typeface="Amiri" pitchFamily="2" charset="-78"/>
                 <a:ea typeface="Amiri" pitchFamily="2" charset="-78"/>
                 <a:cs typeface="Amiri" pitchFamily="2" charset="-78"/>
               </a:rPr>
@@ -4046,7 +4046,7 @@
                 <a:solidFill>
                   <a:srgbClr val="FFFFFF"/>
                 </a:solidFill>
-                <a:latin typeface="Calibri" pitchFamily="34" charset="0"/>
+                <a:latin typeface="Amiri" pitchFamily="2" charset="-78"/>
                 <a:ea typeface="Amiri" pitchFamily="2" charset="-78"/>
                 <a:cs typeface="Amiri" pitchFamily="2" charset="-78"/>
               </a:rPr>
@@ -4844,7 +4844,7 @@
                 <a:solidFill>
                   <a:srgbClr val="FFFFFF"/>
                 </a:solidFill>
-                <a:latin typeface="Calibri" pitchFamily="34" charset="0"/>
+                <a:latin typeface="Amiri" pitchFamily="2" charset="-78"/>
                 <a:ea typeface="Amiri" pitchFamily="2" charset="-78"/>
                 <a:cs typeface="Amiri" pitchFamily="2" charset="-78"/>
               </a:rPr>
@@ -4910,7 +4910,7 @@
                 <a:solidFill>
                   <a:srgbClr val="FFFFFF"/>
                 </a:solidFill>
-                <a:latin typeface="Calibri" pitchFamily="34" charset="0"/>
+                <a:latin typeface="Amiri" pitchFamily="2" charset="-78"/>
                 <a:ea typeface="Amiri" pitchFamily="2" charset="-78"/>
                 <a:cs typeface="Amiri" pitchFamily="2" charset="-78"/>
               </a:rPr>
@@ -4976,7 +4976,7 @@
                 <a:solidFill>
                   <a:srgbClr val="FFFFFF"/>
                 </a:solidFill>
-                <a:latin typeface="Calibri" pitchFamily="34" charset="0"/>
+                <a:latin typeface="Amiri" pitchFamily="2" charset="-78"/>
                 <a:ea typeface="Amiri" pitchFamily="2" charset="-78"/>
                 <a:cs typeface="Amiri" pitchFamily="2" charset="-78"/>
               </a:rPr>
@@ -5042,7 +5042,7 @@
                 <a:solidFill>
                   <a:srgbClr val="FFFFFF"/>
                 </a:solidFill>
-                <a:latin typeface="Calibri" pitchFamily="34" charset="0"/>
+                <a:latin typeface="Amiri" pitchFamily="2" charset="-78"/>
                 <a:ea typeface="Amiri" pitchFamily="2" charset="-78"/>
                 <a:cs typeface="Amiri" pitchFamily="2" charset="-78"/>
               </a:rPr>
@@ -8599,7 +8599,7 @@
                 <a:solidFill>
                   <a:srgbClr val="FFFFFF"/>
                 </a:solidFill>
-                <a:latin typeface="Calibri" pitchFamily="34" charset="0"/>
+                <a:latin typeface="Amiri" pitchFamily="2" charset="-78"/>
                 <a:ea typeface="Amiri" pitchFamily="2" charset="-78"/>
                 <a:cs typeface="Amiri" pitchFamily="2" charset="-78"/>
               </a:rPr>
@@ -8665,7 +8665,7 @@
                 <a:solidFill>
                   <a:srgbClr val="FFFFFF"/>
                 </a:solidFill>
-                <a:latin typeface="Calibri" pitchFamily="34" charset="0"/>
+                <a:latin typeface="Amiri" pitchFamily="2" charset="-78"/>
                 <a:ea typeface="Amiri" pitchFamily="2" charset="-78"/>
                 <a:cs typeface="Amiri" pitchFamily="2" charset="-78"/>
               </a:rPr>
@@ -8731,7 +8731,7 @@
                 <a:solidFill>
                   <a:srgbClr val="FFFFFF"/>
                 </a:solidFill>
-                <a:latin typeface="Calibri" pitchFamily="34" charset="0"/>
+                <a:latin typeface="Amiri" pitchFamily="2" charset="-78"/>
                 <a:ea typeface="Amiri" pitchFamily="2" charset="-78"/>
                 <a:cs typeface="Amiri" pitchFamily="2" charset="-78"/>
               </a:rPr>
@@ -8797,7 +8797,7 @@
                 <a:solidFill>
                   <a:srgbClr val="FFFFFF"/>
                 </a:solidFill>
-                <a:latin typeface="Calibri" pitchFamily="34" charset="0"/>
+                <a:latin typeface="Amiri" pitchFamily="2" charset="-78"/>
                 <a:ea typeface="Amiri" pitchFamily="2" charset="-78"/>
                 <a:cs typeface="Amiri" pitchFamily="2" charset="-78"/>
               </a:rPr>
@@ -9584,7 +9584,7 @@
                 <a:solidFill>
                   <a:srgbClr val="FFFFFF"/>
                 </a:solidFill>
-                <a:latin typeface="Calibri" pitchFamily="34" charset="0"/>
+                <a:latin typeface="Amiri" pitchFamily="2" charset="-78"/>
                 <a:ea typeface="Amiri" pitchFamily="2" charset="-78"/>
                 <a:cs typeface="Amiri" pitchFamily="2" charset="-78"/>
               </a:rPr>
@@ -9650,7 +9650,7 @@
                 <a:solidFill>
                   <a:srgbClr val="FFFFFF"/>
                 </a:solidFill>
-                <a:latin typeface="Calibri" pitchFamily="34" charset="0"/>
+                <a:latin typeface="Amiri" pitchFamily="2" charset="-78"/>
                 <a:ea typeface="Amiri" pitchFamily="2" charset="-78"/>
                 <a:cs typeface="Amiri" pitchFamily="2" charset="-78"/>
               </a:rPr>
@@ -9716,7 +9716,7 @@
                 <a:solidFill>
                   <a:srgbClr val="FFFFFF"/>
                 </a:solidFill>
-                <a:latin typeface="Calibri" pitchFamily="34" charset="0"/>
+                <a:latin typeface="Amiri" pitchFamily="2" charset="-78"/>
                 <a:ea typeface="Amiri" pitchFamily="2" charset="-78"/>
                 <a:cs typeface="Amiri" pitchFamily="2" charset="-78"/>
               </a:rPr>
@@ -9782,7 +9782,7 @@
                 <a:solidFill>
                   <a:srgbClr val="FFFFFF"/>
                 </a:solidFill>
-                <a:latin typeface="Calibri" pitchFamily="34" charset="0"/>
+                <a:latin typeface="Amiri" pitchFamily="2" charset="-78"/>
                 <a:ea typeface="Amiri" pitchFamily="2" charset="-78"/>
                 <a:cs typeface="Amiri" pitchFamily="2" charset="-78"/>
               </a:rPr>
@@ -10569,7 +10569,7 @@
                 <a:solidFill>
                   <a:srgbClr val="FFFFFF"/>
                 </a:solidFill>
-                <a:latin typeface="Calibri" pitchFamily="34" charset="0"/>
+                <a:latin typeface="Amiri" pitchFamily="2" charset="-78"/>
                 <a:ea typeface="Amiri" pitchFamily="2" charset="-78"/>
                 <a:cs typeface="Amiri" pitchFamily="2" charset="-78"/>
               </a:rPr>
@@ -10635,7 +10635,7 @@
                 <a:solidFill>
                   <a:srgbClr val="FFFFFF"/>
                 </a:solidFill>
-                <a:latin typeface="Calibri" pitchFamily="34" charset="0"/>
+                <a:latin typeface="Amiri" pitchFamily="2" charset="-78"/>
                 <a:ea typeface="Amiri" pitchFamily="2" charset="-78"/>
                 <a:cs typeface="Amiri" pitchFamily="2" charset="-78"/>
               </a:rPr>
@@ -10701,7 +10701,7 @@
                 <a:solidFill>
                   <a:srgbClr val="FFFFFF"/>
                 </a:solidFill>
-                <a:latin typeface="Calibri" pitchFamily="34" charset="0"/>
+                <a:latin typeface="Amiri" pitchFamily="2" charset="-78"/>
                 <a:ea typeface="Amiri" pitchFamily="2" charset="-78"/>
                 <a:cs typeface="Amiri" pitchFamily="2" charset="-78"/>
               </a:rPr>
@@ -10767,7 +10767,7 @@
                 <a:solidFill>
                   <a:srgbClr val="FFFFFF"/>
                 </a:solidFill>
-                <a:latin typeface="Calibri" pitchFamily="34" charset="0"/>
+                <a:latin typeface="Amiri" pitchFamily="2" charset="-78"/>
                 <a:ea typeface="Amiri" pitchFamily="2" charset="-78"/>
                 <a:cs typeface="Amiri" pitchFamily="2" charset="-78"/>
               </a:rPr>
